--- a/public/fun/pack/pptx/reviewpro/보장점검양식프리미엄_24_부모님점검_코랄샌드.pptx
+++ b/public/fun/pack/pptx/reviewpro/보장점검양식프리미엄_24_부모님점검_코랄샌드.pptx
@@ -112,12 +112,12 @@
   <p:extLst>
     <p:ext uri="{521415D9-36F7-43E2-AB2F-B90AF26B5E84}">
       <p14:sectionLst xmlns:p14="http://schemas.microsoft.com/office/powerpoint/2010/main">
-        <p14:section name="시작" id="{FF77BD6D-4AB6-4EC3-AB07-435CE85B25B6}">
+        <p14:section name="시작" id="{744D2FB1-F4E3-48D9-9862-EDEAB1E74ABA}">
           <p14:sldIdLst>
             <p14:sldId id="256"/>
           </p14:sldIdLst>
         </p14:section>
-        <p14:section name="본문" id="{3163E346-35F7-4EEE-8180-6E81144411D9}">
+        <p14:section name="본문" id="{330416E7-0E3E-4C0B-AFEF-226C6D87C770}">
           <p14:sldIdLst>
             <p14:sldId id="257"/>
             <p14:sldId id="258"/>
@@ -2886,7 +2886,7 @@
             </a:lvl1pPr>
           </a:lstStyle>
           <a:p>
-            <a:fld id="{B25D65F0-3C16-43FC-A83D-96983307909C}" type="slidenum">
+            <a:fld id="{9B356D8E-C7CA-448B-8490-39C9AB8A8BF7}" type="slidenum">
               <a:rPr lang="en-US"/>
               <a:t>‹#›</a:t>
             </a:fld>
@@ -4943,7 +4943,7 @@
             </a:lvl1pPr>
           </a:lstStyle>
           <a:p>
-            <a:fld id="{BAC2C94A-5C83-4877-95E5-7DD4E0041132}" type="slidenum">
+            <a:fld id="{EC37D6C9-A1BC-4D7B-9F37-94465366A1DB}" type="slidenum">
               <a:rPr lang="en-US"/>
               <a:t>‹#›</a:t>
             </a:fld>
@@ -5692,7 +5692,7 @@
             </a:lvl1pPr>
           </a:lstStyle>
           <a:p>
-            <a:fld id="{4598AB86-FA80-4F4D-A14E-BF4CBDC1F6C9}" type="slidenum">
+            <a:fld id="{85D0995F-9C85-465E-B265-A0A143B5D70F}" type="slidenum">
               <a:rPr lang="en-US"/>
               <a:t>‹#›</a:t>
             </a:fld>
@@ -6577,7 +6577,7 @@
           <a:p>
             <a:r>
               <a:rPr lang="ko-KR"/>
-              <a:t>부모님 점검 · 0000. 00. 00</a:t>
+              <a:t>부모님 점검 · 날짜 입력</a:t>
             </a:r>
           </a:p>
           <a:p>
@@ -6690,7 +6690,7 @@
           <a:bodyPr/>
           <a:lstStyle/>
           <a:p>
-            <a:fld id="{E2271E32-9B67-4B1B-8448-54AE9BA55AEA}" type="slidenum">
+            <a:fld id="{5ADEFCFE-E9F0-4277-95A4-15E4D788A7DA}" type="slidenum">
               <a:rPr lang="en-US"/>
               <a:t>‹#›</a:t>
             </a:fld>
@@ -7425,7 +7425,7 @@
           <a:bodyPr/>
           <a:lstStyle/>
           <a:p>
-            <a:fld id="{54F84123-C716-4699-9995-F24C27B6C331}" type="slidenum">
+            <a:fld id="{C86E96C5-7096-4B01-9848-EAC488C0E577}" type="slidenum">
               <a:rPr lang="en-US"/>
               <a:t>‹#›</a:t>
             </a:fld>
@@ -8953,7 +8953,7 @@
           <a:bodyPr/>
           <a:lstStyle/>
           <a:p>
-            <a:fld id="{540D0C22-F0C7-4532-B355-1E454828787D}" type="slidenum">
+            <a:fld id="{FA80D755-8E2F-47B6-994A-77D6D65DD9D1}" type="slidenum">
               <a:rPr lang="en-US"/>
               <a:t>‹#›</a:t>
             </a:fld>
@@ -10525,7 +10525,7 @@
           <a:bodyPr/>
           <a:lstStyle/>
           <a:p>
-            <a:fld id="{C442A785-A8F7-4FC9-9D4D-A0BCE1289FA4}" type="slidenum">
+            <a:fld id="{88FEF0A5-A6DE-44CE-9AA7-E38C0DE5316E}" type="slidenum">
               <a:rPr lang="en-US"/>
               <a:t>‹#›</a:t>
             </a:fld>
@@ -11481,7 +11481,7 @@
           <a:bodyPr/>
           <a:lstStyle/>
           <a:p>
-            <a:fld id="{02A34BC6-B8BD-4566-8CD3-699327728F8D}" type="slidenum">
+            <a:fld id="{D9FD1D0C-417F-4ACF-A2C9-68AECEFED2EC}" type="slidenum">
               <a:rPr lang="en-US"/>
               <a:t>‹#›</a:t>
             </a:fld>
